--- a/dist/초2/수학/도형과측정/초2_수학_도형과측정_02_쌓기나무_학생용.pptx
+++ b/dist/초2/수학/도형과측정/초2_수학_도형과측정_02_쌓기나무_학생용.pptx
@@ -119,13 +119,13 @@
   <p:extLst>
     <p:ext uri="{521415D9-36F7-43E2-AB2F-B90AF26B5E84}">
       <p14:sectionLst xmlns:p14="http://schemas.microsoft.com/office/powerpoint/2010/main">
-        <p14:section name="도입" id="{fc149a4c-9947-b0f8-36f6-aefa39937847}">
+        <p14:section name="도입" id="{71c6cca1-74a0-b7d3-a096-02a5bef2b9c1}">
           <p14:sldIdLst>
             <p14:sldId id="256"/>
             <p14:sldId id="257"/>
           </p14:sldIdLst>
         </p14:section>
-        <p14:section name="개념" id="{d8f7c1dc-a728-1544-6593-3da5c9d46ecf}">
+        <p14:section name="개념" id="{cd056889-a95f-4e2a-04a3-d732a51c4e65}">
           <p14:sldIdLst>
             <p14:sldId id="258"/>
             <p14:sldId id="259"/>
@@ -133,25 +133,25 @@
             <p14:sldId id="261"/>
           </p14:sldIdLst>
         </p14:section>
-        <p14:section name="연습" id="{e41c8215-a971-c4aa-8c31-64d016a39acc}">
+        <p14:section name="연습" id="{3387abb5-ca7e-552c-22b8-6cdd448a3ddf}">
           <p14:sldIdLst>
             <p14:sldId id="262"/>
             <p14:sldId id="263"/>
             <p14:sldId id="264"/>
           </p14:sldIdLst>
         </p14:section>
-        <p14:section name="확인" id="{28182f9a-a85e-4fa8-7c82-2083a7f0e891}">
+        <p14:section name="확인" id="{cc8c8e4a-64ab-21eb-ca47-8bb669e4d95b}">
           <p14:sldIdLst>
             <p14:sldId id="265"/>
             <p14:sldId id="266"/>
           </p14:sldIdLst>
         </p14:section>
-        <p14:section name="정리" id="{ef2387f4-9e23-e330-96e6-2b746c4de5bb}">
+        <p14:section name="정리" id="{4c30acae-1f70-6e19-9711-8accdd55c351}">
           <p14:sldIdLst>
             <p14:sldId id="267"/>
           </p14:sldIdLst>
         </p14:section>
-        <p14:section name="보충" id="{d3e90089-8461-e482-4d00-572736f75421}">
+        <p14:section name="보충" id="{38907f3b-79f7-3938-8ed5-86738b452fbb}">
           <p14:sldIdLst>
             <p14:sldId id="268"/>
           </p14:sldIdLst>
@@ -5682,7 +5682,7 @@
         </p:nvSpPr>
         <p:spPr>
           <a:xfrm>
-            <a:off x="2875788" y="2011680"/>
+            <a:off x="3515868" y="2011680"/>
             <a:ext cx="1143000" cy="1143000"/>
           </a:xfrm>
           <a:prstGeom prst="rect">
@@ -5754,7 +5754,7 @@
         </p:nvSpPr>
         <p:spPr>
           <a:xfrm>
-            <a:off x="2875788" y="3526675"/>
+            <a:off x="3515868" y="3526675"/>
             <a:ext cx="1143000" cy="1039091"/>
           </a:xfrm>
           <a:prstGeom prst="triangle">

--- a/dist/초2/수학/도형과측정/초2_수학_도형과측정_02_쌓기나무_학생용.pptx
+++ b/dist/초2/수학/도형과측정/초2_수학_도형과측정_02_쌓기나무_학생용.pptx
@@ -119,13 +119,13 @@
   <p:extLst>
     <p:ext uri="{521415D9-36F7-43E2-AB2F-B90AF26B5E84}">
       <p14:sectionLst xmlns:p14="http://schemas.microsoft.com/office/powerpoint/2010/main">
-        <p14:section name="도입" id="{71c6cca1-74a0-b7d3-a096-02a5bef2b9c1}">
+        <p14:section name="도입" id="{86e21d1b-174b-02eb-a5bf-ace4ac304c03}">
           <p14:sldIdLst>
             <p14:sldId id="256"/>
             <p14:sldId id="257"/>
           </p14:sldIdLst>
         </p14:section>
-        <p14:section name="개념" id="{cd056889-a95f-4e2a-04a3-d732a51c4e65}">
+        <p14:section name="개념" id="{e4f790af-63d2-0603-8d36-2cd7a326bdb6}">
           <p14:sldIdLst>
             <p14:sldId id="258"/>
             <p14:sldId id="259"/>
@@ -133,25 +133,25 @@
             <p14:sldId id="261"/>
           </p14:sldIdLst>
         </p14:section>
-        <p14:section name="연습" id="{3387abb5-ca7e-552c-22b8-6cdd448a3ddf}">
+        <p14:section name="연습" id="{35778b2a-c297-f0a8-44aa-e909850fc451}">
           <p14:sldIdLst>
             <p14:sldId id="262"/>
             <p14:sldId id="263"/>
             <p14:sldId id="264"/>
           </p14:sldIdLst>
         </p14:section>
-        <p14:section name="확인" id="{cc8c8e4a-64ab-21eb-ca47-8bb669e4d95b}">
+        <p14:section name="확인" id="{ad248adc-0cf9-4e73-d0f7-a91c1bc24a62}">
           <p14:sldIdLst>
             <p14:sldId id="265"/>
             <p14:sldId id="266"/>
           </p14:sldIdLst>
         </p14:section>
-        <p14:section name="정리" id="{4c30acae-1f70-6e19-9711-8accdd55c351}">
+        <p14:section name="정리" id="{3ef4639d-f54b-f9bc-efc2-2144b29a9298}">
           <p14:sldIdLst>
             <p14:sldId id="267"/>
           </p14:sldIdLst>
         </p14:section>
-        <p14:section name="보충" id="{38907f3b-79f7-3938-8ed5-86738b452fbb}">
+        <p14:section name="보충" id="{4cf426f0-7647-a5b8-309e-f322d9b169ce}">
           <p14:sldIdLst>
             <p14:sldId id="268"/>
           </p14:sldIdLst>
@@ -7735,7 +7735,7 @@
         </p:nvSpPr>
         <p:spPr>
           <a:xfrm>
-            <a:off x="548640" y="3424428"/>
+            <a:off x="548640" y="3202940"/>
             <a:ext cx="548640" cy="548640"/>
           </a:xfrm>
           <a:prstGeom prst="ellipse">
@@ -7780,7 +7780,7 @@
         </p:nvSpPr>
         <p:spPr>
           <a:xfrm>
-            <a:off x="1325880" y="3424428"/>
+            <a:off x="1325880" y="3202940"/>
             <a:ext cx="5229271" cy="548640"/>
           </a:xfrm>
           <a:prstGeom prst="rect">
@@ -7819,7 +7819,7 @@
         </p:nvSpPr>
         <p:spPr>
           <a:xfrm>
-            <a:off x="548640" y="4137660"/>
+            <a:off x="548640" y="3961892"/>
             <a:ext cx="548640" cy="548640"/>
           </a:xfrm>
           <a:prstGeom prst="ellipse">
@@ -7864,8 +7864,8 @@
         </p:nvSpPr>
         <p:spPr>
           <a:xfrm>
-            <a:off x="1325880" y="4137660"/>
-            <a:ext cx="5229271" cy="548640"/>
+            <a:off x="1325880" y="3916172"/>
+            <a:ext cx="5229271" cy="991616"/>
           </a:xfrm>
           <a:prstGeom prst="rect">
             <a:avLst/>
@@ -7903,7 +7903,7 @@
         </p:nvSpPr>
         <p:spPr>
           <a:xfrm>
-            <a:off x="548640" y="4850892"/>
+            <a:off x="548640" y="5072380"/>
             <a:ext cx="548640" cy="548640"/>
           </a:xfrm>
           <a:prstGeom prst="ellipse">
@@ -7948,7 +7948,7 @@
         </p:nvSpPr>
         <p:spPr>
           <a:xfrm>
-            <a:off x="1325880" y="4850892"/>
+            <a:off x="1325880" y="5072380"/>
             <a:ext cx="5229271" cy="548640"/>
           </a:xfrm>
           <a:prstGeom prst="rect">
